--- a/topic06/talk-1/Typescript(Javascript) top-up.pptx
+++ b/topic06/talk-1/Typescript(Javascript) top-up.pptx
@@ -202,7 +202,7 @@
           <a:p>
             <a:fld id="{0E818C0E-31A9-485B-A2BA-BE5D98D690A4}" type="datetimeFigureOut">
               <a:rPr lang="en-IE" smtClean="0"/>
-              <a:t>04/06/2024</a:t>
+              <a:t>24/03/2026</a:t>
             </a:fld>
             <a:endParaRPr lang="en-IE"/>
           </a:p>
@@ -746,7 +746,7 @@
           <a:p>
             <a:fld id="{F85EC373-F805-4A08-883B-933392D111E4}" type="datetimeFigureOut">
               <a:rPr lang="en-IE" smtClean="0"/>
-              <a:t>04/06/2024</a:t>
+              <a:t>24/03/2026</a:t>
             </a:fld>
             <a:endParaRPr lang="en-IE"/>
           </a:p>
@@ -946,7 +946,7 @@
           <a:p>
             <a:fld id="{F85EC373-F805-4A08-883B-933392D111E4}" type="datetimeFigureOut">
               <a:rPr lang="en-IE" smtClean="0"/>
-              <a:t>04/06/2024</a:t>
+              <a:t>24/03/2026</a:t>
             </a:fld>
             <a:endParaRPr lang="en-IE"/>
           </a:p>
@@ -1156,7 +1156,7 @@
           <a:p>
             <a:fld id="{F85EC373-F805-4A08-883B-933392D111E4}" type="datetimeFigureOut">
               <a:rPr lang="en-IE" smtClean="0"/>
-              <a:t>04/06/2024</a:t>
+              <a:t>24/03/2026</a:t>
             </a:fld>
             <a:endParaRPr lang="en-IE"/>
           </a:p>
@@ -1356,7 +1356,7 @@
           <a:p>
             <a:fld id="{F85EC373-F805-4A08-883B-933392D111E4}" type="datetimeFigureOut">
               <a:rPr lang="en-IE" smtClean="0"/>
-              <a:t>04/06/2024</a:t>
+              <a:t>24/03/2026</a:t>
             </a:fld>
             <a:endParaRPr lang="en-IE"/>
           </a:p>
@@ -1632,7 +1632,7 @@
           <a:p>
             <a:fld id="{F85EC373-F805-4A08-883B-933392D111E4}" type="datetimeFigureOut">
               <a:rPr lang="en-IE" smtClean="0"/>
-              <a:t>04/06/2024</a:t>
+              <a:t>24/03/2026</a:t>
             </a:fld>
             <a:endParaRPr lang="en-IE"/>
           </a:p>
@@ -1900,7 +1900,7 @@
           <a:p>
             <a:fld id="{F85EC373-F805-4A08-883B-933392D111E4}" type="datetimeFigureOut">
               <a:rPr lang="en-IE" smtClean="0"/>
-              <a:t>04/06/2024</a:t>
+              <a:t>24/03/2026</a:t>
             </a:fld>
             <a:endParaRPr lang="en-IE"/>
           </a:p>
@@ -2315,7 +2315,7 @@
           <a:p>
             <a:fld id="{F85EC373-F805-4A08-883B-933392D111E4}" type="datetimeFigureOut">
               <a:rPr lang="en-IE" smtClean="0"/>
-              <a:t>04/06/2024</a:t>
+              <a:t>24/03/2026</a:t>
             </a:fld>
             <a:endParaRPr lang="en-IE"/>
           </a:p>
@@ -2457,7 +2457,7 @@
           <a:p>
             <a:fld id="{F85EC373-F805-4A08-883B-933392D111E4}" type="datetimeFigureOut">
               <a:rPr lang="en-IE" smtClean="0"/>
-              <a:t>04/06/2024</a:t>
+              <a:t>24/03/2026</a:t>
             </a:fld>
             <a:endParaRPr lang="en-IE"/>
           </a:p>
@@ -2570,7 +2570,7 @@
           <a:p>
             <a:fld id="{F85EC373-F805-4A08-883B-933392D111E4}" type="datetimeFigureOut">
               <a:rPr lang="en-IE" smtClean="0"/>
-              <a:t>04/06/2024</a:t>
+              <a:t>24/03/2026</a:t>
             </a:fld>
             <a:endParaRPr lang="en-IE"/>
           </a:p>
@@ -2883,7 +2883,7 @@
           <a:p>
             <a:fld id="{F85EC373-F805-4A08-883B-933392D111E4}" type="datetimeFigureOut">
               <a:rPr lang="en-IE" smtClean="0"/>
-              <a:t>04/06/2024</a:t>
+              <a:t>24/03/2026</a:t>
             </a:fld>
             <a:endParaRPr lang="en-IE"/>
           </a:p>
@@ -3172,7 +3172,7 @@
           <a:p>
             <a:fld id="{F85EC373-F805-4A08-883B-933392D111E4}" type="datetimeFigureOut">
               <a:rPr lang="en-IE" smtClean="0"/>
-              <a:t>04/06/2024</a:t>
+              <a:t>24/03/2026</a:t>
             </a:fld>
             <a:endParaRPr lang="en-IE"/>
           </a:p>
@@ -3415,7 +3415,7 @@
           <a:p>
             <a:fld id="{F85EC373-F805-4A08-883B-933392D111E4}" type="datetimeFigureOut">
               <a:rPr lang="en-IE" smtClean="0"/>
-              <a:t>04/06/2024</a:t>
+              <a:t>24/03/2026</a:t>
             </a:fld>
             <a:endParaRPr lang="en-IE"/>
           </a:p>
@@ -4872,8 +4872,12 @@
           <a:lstStyle/>
           <a:p>
             <a:r>
+              <a:rPr lang="en-GB"/>
+              <a:t>Arrays </a:t>
+            </a:r>
+            <a:r>
               <a:rPr lang="en-GB" dirty="0"/>
-              <a:t>JS arrays and objects are </a:t>
+              <a:t>and objects are </a:t>
             </a:r>
             <a:r>
               <a:rPr lang="en-GB" dirty="0" err="1"/>
